--- a/Topic_E/Exam_Practice/TE-L03_Writing_Workshop_Culture_and_Personal_Identity.pptx
+++ b/Topic_E/Exam_Practice/TE-L03_Writing_Workshop_Culture_and_Personal_Identity.pptx
@@ -784,7 +784,11 @@
           <a:lstStyle/>
           <a:p>
             <a:r>
-              <a:rPr lang="en-US" dirty="0"/>
+              <a:rPr lang="ar-SA" dirty="0">
+                <a:latin typeface="Amiri" pitchFamily="2" charset="-78"/>
+                <a:ea typeface="Amiri" pitchFamily="2" charset="-78"/>
+                <a:cs typeface="Amiri" pitchFamily="2" charset="-78"/>
+              </a:rPr>
               <a:t>Q3 (3 min to choose and read). Title (أ) suits Core and Develop; title (ب) suits Stretch.</a:t>
             </a:r>
             <a:endParaRPr lang="en-US" dirty="0"/>
@@ -1403,7 +1407,11 @@
           <a:lstStyle/>
           <a:p>
             <a:r>
-              <a:rPr lang="en-US" dirty="0"/>
+              <a:rPr lang="ar-SA" dirty="0">
+                <a:latin typeface="Amiri" pitchFamily="2" charset="-78"/>
+                <a:ea typeface="Amiri" pitchFamily="2" charset="-78"/>
+                <a:cs typeface="Amiri" pitchFamily="2" charset="-78"/>
+              </a:rPr>
               <a:t>WELCOME (1 min) — while students join.
 • Greet each student by name as they arrive: السَّلَامُ عَلَيْكُمْ. Take the register (Pastoral Tracker: attendance 0/1).
 • 2-MINUTE CHECK-IN (SEND training): a private chat to any student who seemed unsettled last lesson — “Are you okay today? 👍 / 👎”.
@@ -1936,7 +1944,11 @@
           <a:lstStyle/>
           <a:p>
             <a:r>
-              <a:rPr lang="en-US" dirty="0"/>
+              <a:rPr lang="ar-SA" dirty="0">
+                <a:latin typeface="Amiri" pitchFamily="2" charset="-78"/>
+                <a:ea typeface="Amiri" pitchFamily="2" charset="-78"/>
+                <a:cs typeface="Amiri" pitchFamily="2" charset="-78"/>
+              </a:rPr>
               <a:t>Question words: مَا (what) · وَضَعْتَ (you put — PAST) · لِمَاذَا (why → لِأَنَّ + مَثَلًا) · سَتَفْعَلُ (you will do — FUTURE).</a:t>
             </a:r>
             <a:endParaRPr lang="en-US" dirty="0"/>
@@ -2508,6 +2520,7 @@
                   <a:srgbClr val="D4AF37"/>
                 </a:solidFill>
                 <a:latin typeface="Amiri" pitchFamily="2" charset="-78"/>
+                <a:ea typeface="Amiri" pitchFamily="2" charset="-78"/>
                 <a:cs typeface="Amiri" pitchFamily="2" charset="-78"/>
               </a:rPr>
               <a:t>م</a:t>
@@ -2714,6 +2727,7 @@
                   <a:srgbClr val="D4AF37"/>
                 </a:solidFill>
                 <a:latin typeface="Amiri" pitchFamily="2" charset="-78"/>
+                <a:ea typeface="Amiri" pitchFamily="2" charset="-78"/>
                 <a:cs typeface="Amiri" pitchFamily="2" charset="-78"/>
               </a:rPr>
               <a:t>وَرْشَةُ الكِتَابَةِ — الثَّقَافَةُ وَالهُوِيَّةُ</a:t>
@@ -3171,6 +3185,7 @@
                   <a:srgbClr val="D4AF37"/>
                 </a:solidFill>
                 <a:latin typeface="Amiri" pitchFamily="2" charset="-78"/>
+                <a:ea typeface="Amiri" pitchFamily="2" charset="-78"/>
                 <a:cs typeface="Amiri" pitchFamily="2" charset="-78"/>
               </a:rPr>
               <a:t>م</a:t>
@@ -3491,6 +3506,7 @@
                   <a:srgbClr val="8A6D1E"/>
                 </a:solidFill>
                 <a:latin typeface="Amiri" pitchFamily="2" charset="-78"/>
+                <a:ea typeface="Amiri" pitchFamily="2" charset="-78"/>
                 <a:cs typeface="Amiri" pitchFamily="2" charset="-78"/>
               </a:rPr>
               <a:t>نَمُوذَجُ الإِجَابَةِ</a:t>
@@ -3604,6 +3620,7 @@
                   <a:srgbClr val="1F2A37"/>
                 </a:solidFill>
                 <a:latin typeface="Amiri" pitchFamily="2" charset="-78"/>
+                <a:ea typeface="Amiri" pitchFamily="2" charset="-78"/>
                 <a:cs typeface="Amiri" pitchFamily="2" charset="-78"/>
               </a:rPr>
               <a:t>مَرْحَبًا يَا آدَمُ،</a:t>
@@ -3623,6 +3640,7 @@
                   <a:srgbClr val="1F2A37"/>
                 </a:solidFill>
                 <a:latin typeface="Amiri" pitchFamily="2" charset="-78"/>
+                <a:ea typeface="Amiri" pitchFamily="2" charset="-78"/>
                 <a:cs typeface="Amiri" pitchFamily="2" charset="-78"/>
               </a:rPr>
               <a:t>كَيْفَ حَالُكَ؟ فِي المَدْرَسَةِ طَلَبَتْ مِنَّا المُعَلِّمَةُ مَشْرُوعًا اسْمُهُ "صُنْدُوقُ هُوِيَّتِي". فِي صُنْدُوقِي وَضَعْتُ ثَلَاثَةَ أَشْيَاءَ. أَوَّلًا، صُورَةً لِبَيْتِ جَدِّي فِي فِلَسْطِينَ. ثَانِيًا، الكُوفِيَّةَ الَّتِي أَعْطَانِي إِيَّاهَا أَبِي. ثَالِثًا، وَصْفَةَ المَقْلُوبَةِ، وَهِيَ أَكْلَتُنَا الشَّعْبِيَّةُ. اخْتَرْتُ هٰذِهِ الأَشْيَاءَ لِأَنَّهَا جُزْءٌ مِنْ ثَقَافَتِي. إِنَّ المَشْرُوعَ كَانَ مُمْتِعًا جِدًّا، لِأَنِّي تَعَلَّمْتُ عَنْ ثَقَافَاتِ زُمَلَائِي أَيْضًا. فِي الأُسْبُوعِ القَادِمِ سَأُقَدِّمُهُ أَمَامَ الصَّفِّ. وَأَنْتَ، مَاذَا تَضَعُ فِي صُنْدُوقِكَ؟</a:t>
@@ -3642,6 +3660,7 @@
                   <a:srgbClr val="1F2A37"/>
                 </a:solidFill>
                 <a:latin typeface="Amiri" pitchFamily="2" charset="-78"/>
+                <a:ea typeface="Amiri" pitchFamily="2" charset="-78"/>
                 <a:cs typeface="Amiri" pitchFamily="2" charset="-78"/>
               </a:rPr>
               <a:t>مَعَ السَّلَامَةِ،</a:t>
@@ -3661,6 +3680,7 @@
                   <a:srgbClr val="1F2A37"/>
                 </a:solidFill>
                 <a:latin typeface="Amiri" pitchFamily="2" charset="-78"/>
+                <a:ea typeface="Amiri" pitchFamily="2" charset="-78"/>
                 <a:cs typeface="Amiri" pitchFamily="2" charset="-78"/>
               </a:rPr>
               <a:t>إِبْرَاهِيمُ</a:t>
@@ -3824,11 +3844,12 @@
               <a:buNone/>
             </a:pPr>
             <a:r>
-              <a:rPr lang="en-US" sz="950" b="1" dirty="0">
+              <a:rPr lang="ar-SA" sz="950" b="1" dirty="0">
                 <a:solidFill>
                   <a:srgbClr val="FFFFFF"/>
                 </a:solidFill>
                 <a:latin typeface="Calibri" pitchFamily="34" charset="0"/>
+                <a:ea typeface="Amiri" pitchFamily="2" charset="-78"/>
                 <a:cs typeface="Amiri" pitchFamily="2" charset="-78"/>
               </a:rPr>
               <a:t>صُنْدُوقُ هُوِيَّتِي</a:t>
@@ -3889,11 +3910,12 @@
               <a:buNone/>
             </a:pPr>
             <a:r>
-              <a:rPr lang="en-US" sz="950" b="1" dirty="0">
+              <a:rPr lang="ar-SA" sz="950" b="1" dirty="0">
                 <a:solidFill>
                   <a:srgbClr val="FFFFFF"/>
                 </a:solidFill>
                 <a:latin typeface="Calibri" pitchFamily="34" charset="0"/>
+                <a:ea typeface="Amiri" pitchFamily="2" charset="-78"/>
                 <a:cs typeface="Amiri" pitchFamily="2" charset="-78"/>
               </a:rPr>
               <a:t>أَكْلَتُنَا الشَّعْبِيَّةُ</a:t>
@@ -3954,11 +3976,12 @@
               <a:buNone/>
             </a:pPr>
             <a:r>
-              <a:rPr lang="en-US" sz="950" b="1" dirty="0">
+              <a:rPr lang="ar-SA" sz="950" b="1" dirty="0">
                 <a:solidFill>
                   <a:srgbClr val="FFFFFF"/>
                 </a:solidFill>
                 <a:latin typeface="Calibri" pitchFamily="34" charset="0"/>
+                <a:ea typeface="Amiri" pitchFamily="2" charset="-78"/>
                 <a:cs typeface="Amiri" pitchFamily="2" charset="-78"/>
               </a:rPr>
               <a:t>جُزْءٌ مِنْ ثَقَافَتِي</a:t>
@@ -4019,11 +4042,12 @@
               <a:buNone/>
             </a:pPr>
             <a:r>
-              <a:rPr lang="en-US" sz="950" b="1" dirty="0">
+              <a:rPr lang="ar-SA" sz="950" b="1" dirty="0">
                 <a:solidFill>
                   <a:srgbClr val="FFFFFF"/>
                 </a:solidFill>
                 <a:latin typeface="Calibri" pitchFamily="34" charset="0"/>
+                <a:ea typeface="Amiri" pitchFamily="2" charset="-78"/>
                 <a:cs typeface="Amiri" pitchFamily="2" charset="-78"/>
               </a:rPr>
               <a:t>إِنَّ المَشْرُوعَ</a:t>
@@ -4157,6 +4181,7 @@
                   <a:srgbClr val="D4AF37"/>
                 </a:solidFill>
                 <a:latin typeface="Amiri" pitchFamily="2" charset="-78"/>
+                <a:ea typeface="Amiri" pitchFamily="2" charset="-78"/>
                 <a:cs typeface="Amiri" pitchFamily="2" charset="-78"/>
               </a:rPr>
               <a:t>م</a:t>
@@ -4477,6 +4502,7 @@
                   <a:srgbClr val="8A6D1E"/>
                 </a:solidFill>
                 <a:latin typeface="Amiri" pitchFamily="2" charset="-78"/>
+                <a:ea typeface="Amiri" pitchFamily="2" charset="-78"/>
                 <a:cs typeface="Amiri" pitchFamily="2" charset="-78"/>
               </a:rPr>
               <a:t>نَمُوذَجُ الإِجَابَةِ</a:t>
@@ -4590,6 +4616,7 @@
                   <a:srgbClr val="1F2A37"/>
                 </a:solidFill>
                 <a:latin typeface="Amiri" pitchFamily="2" charset="-78"/>
+                <a:ea typeface="Amiri" pitchFamily="2" charset="-78"/>
                 <a:cs typeface="Amiri" pitchFamily="2" charset="-78"/>
               </a:rPr>
               <a:t>عَزِيزِي آدَمُ،</a:t>
@@ -4609,6 +4636,7 @@
                   <a:srgbClr val="1F2A37"/>
                 </a:solidFill>
                 <a:latin typeface="Amiri" pitchFamily="2" charset="-78"/>
+                <a:ea typeface="Amiri" pitchFamily="2" charset="-78"/>
                 <a:cs typeface="Amiri" pitchFamily="2" charset="-78"/>
               </a:rPr>
               <a:t>أَكْتُبُ إِلَيْكَ وَأَنَا مُتَحَمِّسٌ لِمَشْرُوعٍ جَدِيدٍ فِي المَدْرَسَةِ اسْمُهُ "صُنْدُوقُ هُوِيَّتِي"؛ إِذْ طَلَبَتْ مِنَّا المُعَلِّمَةُ أَنْ نَضَعَ فِي صُنْدُوقٍ ثَلَاثَةَ أَشْيَاءَ تُعَبِّرُ عَنَّا. فَاخْتَرْتُ مِفْتَاحَ بَيْتِ جَدِّي القَدِيمِ فِي يَافَا، وَالكُوفِيَّةَ الَّتِي أَهْدَانِي إِيَّاهَا أَبِي، وَوَصْفَةَ المَقْلُوبَةِ بِخَطِّ جَدَّتِي. إِنَّ كُلَّ شَيْءٍ مِنْهَا يَحْمِلُ قِصَّةً؛ فَالمِفْتَاحُ مَثَلًا يُذَكِّرُنَا بِأَنَّ جُذُورَنَا عَمِيقَةٌ مَهْمَا ابْتَعَدْنَا. وَقَدْ أَعْجَبَنِي المَشْرُوعُ لِأَنَّهُ جَعَلَنِي أَسْأَلُ أَهْلِي أَسْئِلَةً لَمْ أَطْرَحْهَا مِنْ قَبْلُ. وَعِنْدَمَا أُقَدِّمُهُ أَمَامَ الصَّفِّ الأُسْبُوعَ القَادِمَ، سَأَطْبُخُ المَقْلُوبَةَ لِزُمَلَائِي! وَأَنْتَ، مَا الشَّيْءُ الَّذِي يُعَبِّرُ عَنْكَ أَكْثَرَ؟</a:t>
@@ -4628,6 +4656,7 @@
                   <a:srgbClr val="1F2A37"/>
                 </a:solidFill>
                 <a:latin typeface="Amiri" pitchFamily="2" charset="-78"/>
+                <a:ea typeface="Amiri" pitchFamily="2" charset="-78"/>
                 <a:cs typeface="Amiri" pitchFamily="2" charset="-78"/>
               </a:rPr>
               <a:t>مَعَ تَحِيَّاتِي،</a:t>
@@ -4647,6 +4676,7 @@
                   <a:srgbClr val="1F2A37"/>
                 </a:solidFill>
                 <a:latin typeface="Amiri" pitchFamily="2" charset="-78"/>
+                <a:ea typeface="Amiri" pitchFamily="2" charset="-78"/>
                 <a:cs typeface="Amiri" pitchFamily="2" charset="-78"/>
               </a:rPr>
               <a:t>إِبْرَاهِيمُ</a:t>
@@ -4810,11 +4840,12 @@
               <a:buNone/>
             </a:pPr>
             <a:r>
-              <a:rPr lang="en-US" sz="950" b="1" dirty="0">
+              <a:rPr lang="ar-SA" sz="950" b="1" dirty="0">
                 <a:solidFill>
                   <a:srgbClr val="FFFFFF"/>
                 </a:solidFill>
                 <a:latin typeface="Calibri" pitchFamily="34" charset="0"/>
+                <a:ea typeface="Amiri" pitchFamily="2" charset="-78"/>
                 <a:cs typeface="Amiri" pitchFamily="2" charset="-78"/>
               </a:rPr>
               <a:t>تُعَبِّرُ عَنَّا</a:t>
@@ -4875,11 +4906,12 @@
               <a:buNone/>
             </a:pPr>
             <a:r>
-              <a:rPr lang="en-US" sz="950" b="1" dirty="0">
+              <a:rPr lang="ar-SA" sz="950" b="1" dirty="0">
                 <a:solidFill>
                   <a:srgbClr val="FFFFFF"/>
                 </a:solidFill>
                 <a:latin typeface="Calibri" pitchFamily="34" charset="0"/>
+                <a:ea typeface="Amiri" pitchFamily="2" charset="-78"/>
                 <a:cs typeface="Amiri" pitchFamily="2" charset="-78"/>
               </a:rPr>
               <a:t>أَهْدَانِي إِيَّاهَا</a:t>
@@ -4940,11 +4972,12 @@
               <a:buNone/>
             </a:pPr>
             <a:r>
-              <a:rPr lang="en-US" sz="950" b="1" dirty="0">
+              <a:rPr lang="ar-SA" sz="950" b="1" dirty="0">
                 <a:solidFill>
                   <a:srgbClr val="FFFFFF"/>
                 </a:solidFill>
                 <a:latin typeface="Calibri" pitchFamily="34" charset="0"/>
+                <a:ea typeface="Amiri" pitchFamily="2" charset="-78"/>
                 <a:cs typeface="Amiri" pitchFamily="2" charset="-78"/>
               </a:rPr>
               <a:t>إِنَّ كُلَّ شَيْءٍ … مَثَلًا</a:t>
@@ -5005,11 +5038,12 @@
               <a:buNone/>
             </a:pPr>
             <a:r>
-              <a:rPr lang="en-US" sz="950" b="1" dirty="0">
+              <a:rPr lang="ar-SA" sz="950" b="1" dirty="0">
                 <a:solidFill>
                   <a:srgbClr val="FFFFFF"/>
                 </a:solidFill>
                 <a:latin typeface="Calibri" pitchFamily="34" charset="0"/>
+                <a:ea typeface="Amiri" pitchFamily="2" charset="-78"/>
                 <a:cs typeface="Amiri" pitchFamily="2" charset="-78"/>
               </a:rPr>
               <a:t>لَمْ أَطْرَحْهَا مِنْ قَبْلُ</a:t>
@@ -5143,6 +5177,7 @@
                   <a:srgbClr val="D4AF37"/>
                 </a:solidFill>
                 <a:latin typeface="Amiri" pitchFamily="2" charset="-78"/>
+                <a:ea typeface="Amiri" pitchFamily="2" charset="-78"/>
                 <a:cs typeface="Amiri" pitchFamily="2" charset="-78"/>
               </a:rPr>
               <a:t>م</a:t>
@@ -5463,6 +5498,7 @@
                   <a:srgbClr val="8A6D1E"/>
                 </a:solidFill>
                 <a:latin typeface="Amiri" pitchFamily="2" charset="-78"/>
+                <a:ea typeface="Amiri" pitchFamily="2" charset="-78"/>
                 <a:cs typeface="Amiri" pitchFamily="2" charset="-78"/>
               </a:rPr>
               <a:t>اخْتَرْ عُنْوَانًا وَاحِدًا</a:t>
@@ -5743,6 +5779,7 @@
                   <a:srgbClr val="1B3B6F"/>
                 </a:solidFill>
                 <a:latin typeface="Amiri" pitchFamily="2" charset="-78"/>
+                <a:ea typeface="Amiri" pitchFamily="2" charset="-78"/>
                 <a:cs typeface="Amiri" pitchFamily="2" charset="-78"/>
               </a:rPr>
               <a:t>مَنْ أَنَا؟ ثَقَافَتِي وَهُوِيَّتِي</a:t>
@@ -5781,6 +5818,7 @@
                   <a:srgbClr val="1B3B6F"/>
                 </a:solidFill>
                 <a:latin typeface="Amiri" pitchFamily="2" charset="-78"/>
+                <a:ea typeface="Amiri" pitchFamily="2" charset="-78"/>
                 <a:cs typeface="Amiri" pitchFamily="2" charset="-78"/>
               </a:rPr>
               <a:t>(أ)</a:t>
@@ -5887,6 +5925,7 @@
                   <a:srgbClr val="1B3B6F"/>
                 </a:solidFill>
                 <a:latin typeface="Amiri" pitchFamily="2" charset="-78"/>
+                <a:ea typeface="Amiri" pitchFamily="2" charset="-78"/>
                 <a:cs typeface="Amiri" pitchFamily="2" charset="-78"/>
               </a:rPr>
               <a:t>أَصْلُكَ وَثَقَافَتُكَ · عَادَاتُ أُسْرَتِكَ (مَعَ مِثَالٍ) · حَيَاتُكَ بَيْنَ البَيْتِ وَالمَدْرَسَةِ · لِمَاذَا تَعْتَزُّ بِثَقَافَتِكَ وَخُطَطُكَ</a:t>
@@ -6018,6 +6057,7 @@
                   <a:srgbClr val="1B3B6F"/>
                 </a:solidFill>
                 <a:latin typeface="Amiri" pitchFamily="2" charset="-78"/>
+                <a:ea typeface="Amiri" pitchFamily="2" charset="-78"/>
                 <a:cs typeface="Amiri" pitchFamily="2" charset="-78"/>
               </a:rPr>
               <a:t>هَلْ تُهَدِّدُ العَوْلَمَةُ هُوِيَّةَ الشُّعُوبِ؟</a:t>
@@ -6056,6 +6096,7 @@
                   <a:srgbClr val="1B3B6F"/>
                 </a:solidFill>
                 <a:latin typeface="Amiri" pitchFamily="2" charset="-78"/>
+                <a:ea typeface="Amiri" pitchFamily="2" charset="-78"/>
                 <a:cs typeface="Amiri" pitchFamily="2" charset="-78"/>
               </a:rPr>
               <a:t>(ب)</a:t>
@@ -6159,6 +6200,7 @@
                   <a:srgbClr val="1B3B6F"/>
                 </a:solidFill>
                 <a:latin typeface="Amiri" pitchFamily="2" charset="-78"/>
+                <a:ea typeface="Amiri" pitchFamily="2" charset="-78"/>
                 <a:cs typeface="Amiri" pitchFamily="2" charset="-78"/>
               </a:rPr>
               <a:t>المَوْضُوعُ · الفَوَائِدُ وَالمَخَاطِرُ · مِثَالٌ مِنْ تَجْرِبَتِكَ · رَأْيُكَ</a:t>
@@ -6358,6 +6400,7 @@
                   <a:srgbClr val="D4AF37"/>
                 </a:solidFill>
                 <a:latin typeface="Amiri" pitchFamily="2" charset="-78"/>
+                <a:ea typeface="Amiri" pitchFamily="2" charset="-78"/>
                 <a:cs typeface="Amiri" pitchFamily="2" charset="-78"/>
               </a:rPr>
               <a:t>م</a:t>
@@ -6678,6 +6721,7 @@
                   <a:srgbClr val="8A6D1E"/>
                 </a:solidFill>
                 <a:latin typeface="Amiri" pitchFamily="2" charset="-78"/>
+                <a:ea typeface="Amiri" pitchFamily="2" charset="-78"/>
                 <a:cs typeface="Amiri" pitchFamily="2" charset="-78"/>
               </a:rPr>
               <a:t>خُطَّةُ الكِتَابَةِ</a:t>
@@ -7302,6 +7346,7 @@
                   <a:srgbClr val="1B3B6F"/>
                 </a:solidFill>
                 <a:latin typeface="Amiri" pitchFamily="2" charset="-78"/>
+                <a:ea typeface="Amiri" pitchFamily="2" charset="-78"/>
                 <a:cs typeface="Amiri" pitchFamily="2" charset="-78"/>
               </a:rPr>
               <a:t>إِنَّ أُسْرَتِي مُهِمَّةٌ جِدًّا فِي ثَقَافَتِنَا.</a:t>
@@ -7401,6 +7446,7 @@
                   <a:srgbClr val="1B3B6F"/>
                 </a:solidFill>
                 <a:latin typeface="Amiri" pitchFamily="2" charset="-78"/>
+                <a:ea typeface="Amiri" pitchFamily="2" charset="-78"/>
                 <a:cs typeface="Amiri" pitchFamily="2" charset="-78"/>
               </a:rPr>
               <a:t>مَثَلًا، نَجْتَمِعُ كُلَّ جُمُعَةٍ فِي بَيْتِ جَدِّي.</a:t>
@@ -7500,6 +7546,7 @@
                   <a:srgbClr val="1B3B6F"/>
                 </a:solidFill>
                 <a:latin typeface="Amiri" pitchFamily="2" charset="-78"/>
+                <a:ea typeface="Amiri" pitchFamily="2" charset="-78"/>
                 <a:cs typeface="Amiri" pitchFamily="2" charset="-78"/>
               </a:rPr>
               <a:t>سَأُعَلِّمُ أَوْلَادِي لُغَتَنَا وَعَادَاتِنَا.</a:t>
@@ -7661,6 +7708,7 @@
                   <a:srgbClr val="1F2A37"/>
                 </a:solidFill>
                 <a:latin typeface="Amiri" pitchFamily="2" charset="-78"/>
+                <a:ea typeface="Amiri" pitchFamily="2" charset="-78"/>
                 <a:cs typeface="Amiri" pitchFamily="2" charset="-78"/>
               </a:rPr>
               <a:t>أ</a:t>
@@ -7687,6 +7735,7 @@
                   <a:srgbClr val="1F2A37"/>
                 </a:solidFill>
                 <a:latin typeface="Amiri" pitchFamily="2" charset="-78"/>
+                <a:ea typeface="Amiri" pitchFamily="2" charset="-78"/>
                 <a:cs typeface="Amiri" pitchFamily="2" charset="-78"/>
               </a:rPr>
               <a:t>ب</a:t>
@@ -7833,6 +7882,7 @@
                   <a:srgbClr val="D4AF37"/>
                 </a:solidFill>
                 <a:latin typeface="Amiri" pitchFamily="2" charset="-78"/>
+                <a:ea typeface="Amiri" pitchFamily="2" charset="-78"/>
                 <a:cs typeface="Amiri" pitchFamily="2" charset="-78"/>
               </a:rPr>
               <a:t>م</a:t>
@@ -8090,6 +8140,7 @@
                   <a:srgbClr val="8A6D1E"/>
                 </a:solidFill>
                 <a:latin typeface="Amiri" pitchFamily="2" charset="-78"/>
+                <a:ea typeface="Amiri" pitchFamily="2" charset="-78"/>
                 <a:cs typeface="Amiri" pitchFamily="2" charset="-78"/>
               </a:rPr>
               <a:t>أ</a:t>
@@ -8154,6 +8205,7 @@
                   <a:srgbClr val="1B3B6F"/>
                 </a:solidFill>
                 <a:latin typeface="Amiri" pitchFamily="2" charset="-78"/>
+                <a:ea typeface="Amiri" pitchFamily="2" charset="-78"/>
                 <a:cs typeface="Amiri" pitchFamily="2" charset="-78"/>
               </a:rPr>
               <a:t>أ</a:t>
@@ -8205,6 +8257,7 @@
                   <a:srgbClr val="8A6D1E"/>
                 </a:solidFill>
                 <a:latin typeface="Amiri" pitchFamily="2" charset="-78"/>
+                <a:ea typeface="Amiri" pitchFamily="2" charset="-78"/>
                 <a:cs typeface="Amiri" pitchFamily="2" charset="-78"/>
               </a:rPr>
               <a:t>نَمُوذَجُ الإِجَابَةِ</a:t>
@@ -8318,6 +8371,7 @@
                   <a:srgbClr val="1F2A37"/>
                 </a:solidFill>
                 <a:latin typeface="Amiri" pitchFamily="2" charset="-78"/>
+                <a:ea typeface="Amiri" pitchFamily="2" charset="-78"/>
                 <a:cs typeface="Amiri" pitchFamily="2" charset="-78"/>
               </a:rPr>
               <a:t>اسْمِي إِبْرَاهِيمُ، وَعُمْرِي سِتَّ عَشْرَةَ سَنَةً. وُلِدْتُ فِي لَنْدَنَ، لٰكِنَّ أَبِي وَأُمِّي مِنْ فِلَسْطِينَ. لِذٰلِكَ هُوِيَّتِي مَزِيجٌ مِنْ ثَقَافَتَيْنِ: الثَّقَافَةِ البَرِيطَانِيَّةِ وَالثَّقَافَةِ الفِلَسْطِينِيَّةِ.</a:t>
@@ -8337,6 +8391,7 @@
                   <a:srgbClr val="1F2A37"/>
                 </a:solidFill>
                 <a:latin typeface="Amiri" pitchFamily="2" charset="-78"/>
+                <a:ea typeface="Amiri" pitchFamily="2" charset="-78"/>
                 <a:cs typeface="Amiri" pitchFamily="2" charset="-78"/>
               </a:rPr>
               <a:t>إِنَّ أُسْرَتِي مُهِمَّةٌ جِدًّا فِي ثَقَافَتِنَا. مَثَلًا، نَجْتَمِعُ كُلَّ يَوْمِ جُمُعَةٍ فِي بَيْتِ جَدِّي، وَنَأْكُلُ المَقْلُوبَةَ مَعًا. جَدَّتِي تَطْبُخُهَا، وَأَنَا أُسَاعِدُهَا فِي المَطْبَخِ، لِأَنِّي أُرِيدُ أَنْ أَتَعَلَّمَ الوَصْفَةَ. فِي العِيدِ أَلْبَسُ الكُوفِيَّةَ، وَنَزُورُ كُلَّ أَقَارِبِنَا، وَنَتَبَادَلُ الهَدَايَا وَالحَلَوِيَّاتِ.</a:t>
@@ -8356,6 +8411,7 @@
                   <a:srgbClr val="1F2A37"/>
                 </a:solidFill>
                 <a:latin typeface="Amiri" pitchFamily="2" charset="-78"/>
+                <a:ea typeface="Amiri" pitchFamily="2" charset="-78"/>
                 <a:cs typeface="Amiri" pitchFamily="2" charset="-78"/>
               </a:rPr>
               <a:t>فِي المَدْرَسَةِ أَتَكَلَّمُ الإِنْجْلِيزِيَّةَ، وَأُحِبُّ كُرَةَ القَدَمِ مِثْلَ أَصْدِقَائِي. أَمَّا فِي البَيْتِ فَنَتَكَلَّمُ العَرَبِيَّةَ. عِنْدَمَا كُنْتُ صَغِيرًا، كُنْتُ أَخْجَلُ مِنْ طَعَامِنَا فِي المَدْرَسَةِ، لٰكِنِّي الآنَ أُشَارِكُهُ مَعَ زُمَلَائِي، وَهُمْ يُحِبُّونَهُ كَثِيرًا.</a:t>
@@ -8375,6 +8431,7 @@
                   <a:srgbClr val="1F2A37"/>
                 </a:solidFill>
                 <a:latin typeface="Amiri" pitchFamily="2" charset="-78"/>
+                <a:ea typeface="Amiri" pitchFamily="2" charset="-78"/>
                 <a:cs typeface="Amiri" pitchFamily="2" charset="-78"/>
               </a:rPr>
               <a:t>أَنَا فَخُورٌ بِثَقَافَتِي، لِأَنَّهَا تُعَلِّمُنِي قِيَمًا جَمِيلَةً، مِثْلَ الكَرَمِ وَاحْتِرَامِ الكِبَارِ وَمُسَاعَدَةِ الجِيرَانِ. فِي المُسْتَقْبَلِ سَأُعَلِّمُ أَوْلَادِي لُغَتَنَا وَعَادَاتِنَا، لِأَنِّي أُرِيدُ أَنْ يَعْرِفُوا جُذُورَهُمْ.</a:t>
@@ -8538,11 +8595,12 @@
               <a:buNone/>
             </a:pPr>
             <a:r>
-              <a:rPr lang="en-US" sz="950" b="1" dirty="0">
+              <a:rPr lang="ar-SA" sz="950" b="1" dirty="0">
                 <a:solidFill>
                   <a:srgbClr val="FFFFFF"/>
                 </a:solidFill>
                 <a:latin typeface="Calibri" pitchFamily="34" charset="0"/>
+                <a:ea typeface="Amiri" pitchFamily="2" charset="-78"/>
                 <a:cs typeface="Amiri" pitchFamily="2" charset="-78"/>
               </a:rPr>
               <a:t>هُوِيَّتِي مَزِيجٌ</a:t>
@@ -8603,11 +8661,12 @@
               <a:buNone/>
             </a:pPr>
             <a:r>
-              <a:rPr lang="en-US" sz="950" b="1" dirty="0">
+              <a:rPr lang="ar-SA" sz="950" b="1" dirty="0">
                 <a:solidFill>
                   <a:srgbClr val="FFFFFF"/>
                 </a:solidFill>
                 <a:latin typeface="Calibri" pitchFamily="34" charset="0"/>
+                <a:ea typeface="Amiri" pitchFamily="2" charset="-78"/>
                 <a:cs typeface="Amiri" pitchFamily="2" charset="-78"/>
               </a:rPr>
               <a:t>إِنَّ أُسْرَتِي</a:t>
@@ -8668,11 +8727,12 @@
               <a:buNone/>
             </a:pPr>
             <a:r>
-              <a:rPr lang="en-US" sz="950" b="1" dirty="0">
+              <a:rPr lang="ar-SA" sz="950" b="1" dirty="0">
                 <a:solidFill>
                   <a:srgbClr val="FFFFFF"/>
                 </a:solidFill>
                 <a:latin typeface="Calibri" pitchFamily="34" charset="0"/>
+                <a:ea typeface="Amiri" pitchFamily="2" charset="-78"/>
                 <a:cs typeface="Amiri" pitchFamily="2" charset="-78"/>
               </a:rPr>
               <a:t>مَثَلًا، نَجْتَمِعُ</a:t>
@@ -8733,11 +8793,12 @@
               <a:buNone/>
             </a:pPr>
             <a:r>
-              <a:rPr lang="en-US" sz="950" b="1" dirty="0">
+              <a:rPr lang="ar-SA" sz="950" b="1" dirty="0">
                 <a:solidFill>
                   <a:srgbClr val="FFFFFF"/>
                 </a:solidFill>
                 <a:latin typeface="Calibri" pitchFamily="34" charset="0"/>
+                <a:ea typeface="Amiri" pitchFamily="2" charset="-78"/>
                 <a:cs typeface="Amiri" pitchFamily="2" charset="-78"/>
               </a:rPr>
               <a:t>لِأَنَّهَا تُعَلِّمُنِي</a:t>
@@ -8871,6 +8932,7 @@
                   <a:srgbClr val="D4AF37"/>
                 </a:solidFill>
                 <a:latin typeface="Amiri" pitchFamily="2" charset="-78"/>
+                <a:ea typeface="Amiri" pitchFamily="2" charset="-78"/>
                 <a:cs typeface="Amiri" pitchFamily="2" charset="-78"/>
               </a:rPr>
               <a:t>م</a:t>
@@ -9128,6 +9190,7 @@
                   <a:srgbClr val="8A6D1E"/>
                 </a:solidFill>
                 <a:latin typeface="Amiri" pitchFamily="2" charset="-78"/>
+                <a:ea typeface="Amiri" pitchFamily="2" charset="-78"/>
                 <a:cs typeface="Amiri" pitchFamily="2" charset="-78"/>
               </a:rPr>
               <a:t>أ</a:t>
@@ -9192,6 +9255,7 @@
                   <a:srgbClr val="1B3B6F"/>
                 </a:solidFill>
                 <a:latin typeface="Amiri" pitchFamily="2" charset="-78"/>
+                <a:ea typeface="Amiri" pitchFamily="2" charset="-78"/>
                 <a:cs typeface="Amiri" pitchFamily="2" charset="-78"/>
               </a:rPr>
               <a:t>أ</a:t>
@@ -9243,6 +9307,7 @@
                   <a:srgbClr val="8A6D1E"/>
                 </a:solidFill>
                 <a:latin typeface="Amiri" pitchFamily="2" charset="-78"/>
+                <a:ea typeface="Amiri" pitchFamily="2" charset="-78"/>
                 <a:cs typeface="Amiri" pitchFamily="2" charset="-78"/>
               </a:rPr>
               <a:t>نَمُوذَجُ الإِجَابَةِ</a:t>
@@ -9356,6 +9421,7 @@
                   <a:srgbClr val="1F2A37"/>
                 </a:solidFill>
                 <a:latin typeface="Amiri" pitchFamily="2" charset="-78"/>
+                <a:ea typeface="Amiri" pitchFamily="2" charset="-78"/>
                 <a:cs typeface="Amiri" pitchFamily="2" charset="-78"/>
               </a:rPr>
               <a:t>يَحْتَفِظُ جَدِّي فِي دُرْجِ مَكْتَبِهِ بِمِفْتَاحٍ حَدِيدِيٍّ قَدِيمٍ، هُوَ مِفْتَاحُ بَيْتِهِ فِي يَافَا. وَكُلَّمَا سَأَلْتُ نَفْسِي: "مَنْ أَنَا؟"، تَذَكَّرْتُ ذٰلِكَ المِفْتَاحَ، لِأَنَّهُ يَفْتَحُ بَابًا عَلَى جُزْءٍ كَبِيرٍ مِنْ هُوِيَّتِي.</a:t>
@@ -9375,6 +9441,7 @@
                   <a:srgbClr val="1F2A37"/>
                 </a:solidFill>
                 <a:latin typeface="Amiri" pitchFamily="2" charset="-78"/>
+                <a:ea typeface="Amiri" pitchFamily="2" charset="-78"/>
                 <a:cs typeface="Amiri" pitchFamily="2" charset="-78"/>
               </a:rPr>
               <a:t>فَأَنَا وُلِدْتُ فِي لَنْدَنَ، وَأُحِبُّ مَطَرَهَا وَحَافِلَاتِهَا الحَمْرَاءَ وَمَتَاحِفَهَا، غَيْرَ أَنَّ بَيْتَنَا فِلَسْطِينِيٌّ بِامْتِيَازٍ: رَائِحَةُ الزَّعْتَرِ وَزَيْتِ الزَّيْتُونِ فِي الصَّبَاحِ، وَحِكَايَاتُ جَدَّتِي فِي المَسَاءِ، وَالعَرَبِيَّةُ الَّتِي لَا نَتَكَلَّمُ غَيْرَهَا عَلَى المَائِدَةِ.</a:t>
@@ -9394,6 +9461,7 @@
                   <a:srgbClr val="1F2A37"/>
                 </a:solidFill>
                 <a:latin typeface="Amiri" pitchFamily="2" charset="-78"/>
+                <a:ea typeface="Amiri" pitchFamily="2" charset="-78"/>
                 <a:cs typeface="Amiri" pitchFamily="2" charset="-78"/>
               </a:rPr>
               <a:t>وَلَمْ يَكُنْ هٰذَا المَزِيجُ سَهْلًا دَائِمًا؛ فَعِنْدَمَا كُنْتُ فِي الابْتِدَائِيَّةِ، كُنْتُ أُخْفِي طَعَامِي عَنْ زُمَلَائِي خَوْفًا مِنْ سُخْرِيَتِهِمْ وَنَظَرَاتِهِمْ. أَمَّا اليَوْمَ، فَقَدْ أَدْرَكْتُ أَنَّ الاخْتِلَافَ لَيْسَ عَيْبًا، بَلْ ثَرْوَةٌ؛ وَالدَّلِيلُ أَنَّ زُمَلَائِي صَارُوا يَطْلُبُونَ مِنِّي أَنْ أُحْضِرَ لَهُمْ كَعْكَ جَدَّتِي فِي كُلِّ مُنَاسَبَةٍ!</a:t>
@@ -9413,6 +9481,7 @@
                   <a:srgbClr val="1F2A37"/>
                 </a:solidFill>
                 <a:latin typeface="Amiri" pitchFamily="2" charset="-78"/>
+                <a:ea typeface="Amiri" pitchFamily="2" charset="-78"/>
                 <a:cs typeface="Amiri" pitchFamily="2" charset="-78"/>
               </a:rPr>
               <a:t>إِنَّ هُوِيَّتِي، فِي رَأْيِي، لَيْسَتْ صُنْدُوقًا مُغْلَقًا، بَلْ بَيْتٌ بِغُرَفٍ كَثِيرَةٍ، لِكُلِّ غُرْفَةٍ مِنْهَا لُغَتُهَا وَذِكْرَيَاتُهَا. وَلَوْ أَعْطَانِي جَدِّي ذٰلِكَ المِفْتَاحَ يَوْمًا، لَحَفِظْتُهُ لِأَوْلَادِي، لِكَيْ يَعْرِفُوا أَنَّ لَهُمْ بَيْتًا هُنَاكَ أَيْضًا.</a:t>
@@ -9511,11 +9580,12 @@
               <a:buNone/>
             </a:pPr>
             <a:r>
-              <a:rPr lang="en-US" sz="950" b="1" dirty="0">
+              <a:rPr lang="ar-SA" sz="950" b="1" dirty="0">
                 <a:solidFill>
                   <a:srgbClr val="FFFFFF"/>
                 </a:solidFill>
                 <a:latin typeface="Calibri" pitchFamily="34" charset="0"/>
+                <a:ea typeface="Amiri" pitchFamily="2" charset="-78"/>
                 <a:cs typeface="Amiri" pitchFamily="2" charset="-78"/>
               </a:rPr>
               <a:t>كُلَّمَا … تَذَكَّرْتُ</a:t>
@@ -9576,11 +9646,12 @@
               <a:buNone/>
             </a:pPr>
             <a:r>
-              <a:rPr lang="en-US" sz="950" b="1" dirty="0">
+              <a:rPr lang="ar-SA" sz="950" b="1" dirty="0">
                 <a:solidFill>
                   <a:srgbClr val="FFFFFF"/>
                 </a:solidFill>
                 <a:latin typeface="Calibri" pitchFamily="34" charset="0"/>
+                <a:ea typeface="Amiri" pitchFamily="2" charset="-78"/>
                 <a:cs typeface="Amiri" pitchFamily="2" charset="-78"/>
               </a:rPr>
               <a:t>لَا نَتَكَلَّمُ غَيْرَهَا</a:t>
@@ -9641,11 +9712,12 @@
               <a:buNone/>
             </a:pPr>
             <a:r>
-              <a:rPr lang="en-US" sz="950" b="1" dirty="0">
+              <a:rPr lang="ar-SA" sz="950" b="1" dirty="0">
                 <a:solidFill>
                   <a:srgbClr val="FFFFFF"/>
                 </a:solidFill>
                 <a:latin typeface="Calibri" pitchFamily="34" charset="0"/>
+                <a:ea typeface="Amiri" pitchFamily="2" charset="-78"/>
                 <a:cs typeface="Amiri" pitchFamily="2" charset="-78"/>
               </a:rPr>
               <a:t>لَيْسَ عَيْبًا، بَلْ ثَرْوَةٌ</a:t>
@@ -9706,11 +9778,12 @@
               <a:buNone/>
             </a:pPr>
             <a:r>
-              <a:rPr lang="en-US" sz="950" b="1" dirty="0">
+              <a:rPr lang="ar-SA" sz="950" b="1" dirty="0">
                 <a:solidFill>
                   <a:srgbClr val="FFFFFF"/>
                 </a:solidFill>
                 <a:latin typeface="Calibri" pitchFamily="34" charset="0"/>
+                <a:ea typeface="Amiri" pitchFamily="2" charset="-78"/>
                 <a:cs typeface="Amiri" pitchFamily="2" charset="-78"/>
               </a:rPr>
               <a:t>لَوْ أَعْطَانِي … لَحَفِظْتُهُ</a:t>
@@ -9844,6 +9917,7 @@
                   <a:srgbClr val="D4AF37"/>
                 </a:solidFill>
                 <a:latin typeface="Amiri" pitchFamily="2" charset="-78"/>
+                <a:ea typeface="Amiri" pitchFamily="2" charset="-78"/>
                 <a:cs typeface="Amiri" pitchFamily="2" charset="-78"/>
               </a:rPr>
               <a:t>م</a:t>
@@ -10101,6 +10175,7 @@
                   <a:srgbClr val="8A6D1E"/>
                 </a:solidFill>
                 <a:latin typeface="Amiri" pitchFamily="2" charset="-78"/>
+                <a:ea typeface="Amiri" pitchFamily="2" charset="-78"/>
                 <a:cs typeface="Amiri" pitchFamily="2" charset="-78"/>
               </a:rPr>
               <a:t>ب</a:t>
@@ -10165,6 +10240,7 @@
                   <a:srgbClr val="1B3B6F"/>
                 </a:solidFill>
                 <a:latin typeface="Amiri" pitchFamily="2" charset="-78"/>
+                <a:ea typeface="Amiri" pitchFamily="2" charset="-78"/>
                 <a:cs typeface="Amiri" pitchFamily="2" charset="-78"/>
               </a:rPr>
               <a:t>ب</a:t>
@@ -10216,6 +10292,7 @@
                   <a:srgbClr val="8A6D1E"/>
                 </a:solidFill>
                 <a:latin typeface="Amiri" pitchFamily="2" charset="-78"/>
+                <a:ea typeface="Amiri" pitchFamily="2" charset="-78"/>
                 <a:cs typeface="Amiri" pitchFamily="2" charset="-78"/>
               </a:rPr>
               <a:t>نَمُوذَجُ الإِجَابَةِ</a:t>
@@ -10329,6 +10406,7 @@
                   <a:srgbClr val="1F2A37"/>
                 </a:solidFill>
                 <a:latin typeface="Amiri" pitchFamily="2" charset="-78"/>
+                <a:ea typeface="Amiri" pitchFamily="2" charset="-78"/>
                 <a:cs typeface="Amiri" pitchFamily="2" charset="-78"/>
               </a:rPr>
               <a:t>فِي أَيِّ مَدِينَةٍ كَبِيرَةٍ فِي العَالَمِ، تَرَى الشَّبَابَ يَلْبَسُونَ المَلَابِسَ نَفْسَهَا، وَيَسْمَعُونَ الأَغَانِيَ نَفْسَهَا، وَيَأْكُلُونَ فِي المَطَاعِمِ نَفْسِهَا. فَهَلْ تُهَدِّدُ العَوْلَمَةُ هُوِيَّاتِ الشُّعُوبِ؟</a:t>
@@ -10348,6 +10426,7 @@
                   <a:srgbClr val="1F2A37"/>
                 </a:solidFill>
                 <a:latin typeface="Amiri" pitchFamily="2" charset="-78"/>
+                <a:ea typeface="Amiri" pitchFamily="2" charset="-78"/>
                 <a:cs typeface="Amiri" pitchFamily="2" charset="-78"/>
               </a:rPr>
               <a:t>لَا شَكَّ أَنَّ لِلْعَوْلَمَةِ فَوَائِدَ؛ فَهِيَ تُتِيحُ لَنَا أَنْ نَتَعَرَّفَ عَلَى ثَقَافَاتٍ بَعِيدَةٍ، مِثْلَ الطَّبْخِ اليَابَانِيِّ وَالمُوسِيقَى الإِفْرِيقِيَّةِ وَالأَفْلَامِ الهِنْدِيَّةِ، دُونَ أَنْ نُغَادِرَ بُيُوتَنَا. وَمَعَ ذٰلِكَ، فَإِنَّ الثَّقَافَاتِ الكَبِيرَةَ تَنْتَشِرُ بِسَبَبِ قُوَّةِ الإِعْلَانَاتِ، مِمَّا يَدْفَعُ اللُّغَاتِ وَالعَادَاتِ الصَّغِيرَةَ إِلَى الاخْتِفَاءِ شَيْئًا فَشَيْئًا.</a:t>
@@ -10367,6 +10446,7 @@
                   <a:srgbClr val="1F2A37"/>
                 </a:solidFill>
                 <a:latin typeface="Amiri" pitchFamily="2" charset="-78"/>
+                <a:ea typeface="Amiri" pitchFamily="2" charset="-78"/>
                 <a:cs typeface="Amiri" pitchFamily="2" charset="-78"/>
               </a:rPr>
               <a:t>وَقَدْ لَاحَظْتُ ذٰلِكَ فِي أُسْرَتِي؛ فَأَبْنَاءُ عَمِّي فِي عَمَّانَ لَا يَعْرِفُونَ الأَغَانِيَ الشَّعْبِيَّةَ الَّتِي كَانَ جَدِّي يُغَنِّيهَا، لٰكِنَّهُمْ يَحْفَظُونَ أَغَانِيَ أَمْرِيكِيَّةً كَثِيرَةً. وَعِنْدَمَا سَجَّلْنَا جَدِّي وَهُوَ يُغَنِّي، وَنَشَرْنَا التَّسْجِيلَ، أُعْجِبَ بِهِ آلَافُ الشَّبَابِ، وَطَلَبَ مِنْهُ أَحْفَادُهُ أَنْ يُعَلِّمَهُمْ إِيَّاهَا.</a:t>
@@ -10386,6 +10466,7 @@
                   <a:srgbClr val="1F2A37"/>
                 </a:solidFill>
                 <a:latin typeface="Amiri" pitchFamily="2" charset="-78"/>
+                <a:ea typeface="Amiri" pitchFamily="2" charset="-78"/>
                 <a:cs typeface="Amiri" pitchFamily="2" charset="-78"/>
               </a:rPr>
               <a:t>لِذٰلِكَ أَرَى أَنَّ العَوْلَمَةَ لَيْسَتْ عَدُوًّا، بَلْ أَدَاةٌ؛ فَهِيَ تُهَدِّدُ مَنْ يَنْسَى ثَقَافَتَهُ، وَتَخْدُمُ مَنْ يَعْتَزُّ بِهَا. وَإِذَا اسْتَخْدَمَ الشَّبَابُ وَسَائِلَهَا لِنَشْرِ تُرَاثِهِمْ، فَسَتُصْبِحُ جِسْرًا بَدَلًا مِنْ أَنْ تَكُونَ خَطَرًا عَلَى هُوِيَّاتِنَا.</a:t>
@@ -10484,11 +10565,12 @@
               <a:buNone/>
             </a:pPr>
             <a:r>
-              <a:rPr lang="en-US" sz="950" b="1" dirty="0">
+              <a:rPr lang="ar-SA" sz="950" b="1" dirty="0">
                 <a:solidFill>
                   <a:srgbClr val="FFFFFF"/>
                 </a:solidFill>
                 <a:latin typeface="Calibri" pitchFamily="34" charset="0"/>
+                <a:ea typeface="Amiri" pitchFamily="2" charset="-78"/>
                 <a:cs typeface="Amiri" pitchFamily="2" charset="-78"/>
               </a:rPr>
               <a:t>لَا شَكَّ أَنَّ لِلْعَوْلَمَةِ</a:t>
@@ -10549,11 +10631,12 @@
               <a:buNone/>
             </a:pPr>
             <a:r>
-              <a:rPr lang="en-US" sz="950" b="1" dirty="0">
+              <a:rPr lang="ar-SA" sz="950" b="1" dirty="0">
                 <a:solidFill>
                   <a:srgbClr val="FFFFFF"/>
                 </a:solidFill>
                 <a:latin typeface="Calibri" pitchFamily="34" charset="0"/>
+                <a:ea typeface="Amiri" pitchFamily="2" charset="-78"/>
                 <a:cs typeface="Amiri" pitchFamily="2" charset="-78"/>
               </a:rPr>
               <a:t>مِمَّا يَدْفَعُ</a:t>
@@ -10614,11 +10697,12 @@
               <a:buNone/>
             </a:pPr>
             <a:r>
-              <a:rPr lang="en-US" sz="950" b="1" dirty="0">
+              <a:rPr lang="ar-SA" sz="950" b="1" dirty="0">
                 <a:solidFill>
                   <a:srgbClr val="FFFFFF"/>
                 </a:solidFill>
                 <a:latin typeface="Calibri" pitchFamily="34" charset="0"/>
+                <a:ea typeface="Amiri" pitchFamily="2" charset="-78"/>
                 <a:cs typeface="Amiri" pitchFamily="2" charset="-78"/>
               </a:rPr>
               <a:t>وَهُوَ يُغَنِّي</a:t>
@@ -10679,11 +10763,12 @@
               <a:buNone/>
             </a:pPr>
             <a:r>
-              <a:rPr lang="en-US" sz="950" b="1" dirty="0">
+              <a:rPr lang="ar-SA" sz="950" b="1" dirty="0">
                 <a:solidFill>
                   <a:srgbClr val="FFFFFF"/>
                 </a:solidFill>
                 <a:latin typeface="Calibri" pitchFamily="34" charset="0"/>
+                <a:ea typeface="Amiri" pitchFamily="2" charset="-78"/>
                 <a:cs typeface="Amiri" pitchFamily="2" charset="-78"/>
               </a:rPr>
               <a:t>لَيْسَتْ عَدُوًّا، بَلْ أَدَاةٌ</a:t>
@@ -10817,6 +10902,7 @@
                   <a:srgbClr val="D4AF37"/>
                 </a:solidFill>
                 <a:latin typeface="Amiri" pitchFamily="2" charset="-78"/>
+                <a:ea typeface="Amiri" pitchFamily="2" charset="-78"/>
                 <a:cs typeface="Amiri" pitchFamily="2" charset="-78"/>
               </a:rPr>
               <a:t>م</a:t>
@@ -11137,6 +11223,7 @@
                   <a:srgbClr val="8A6D1E"/>
                 </a:solidFill>
                 <a:latin typeface="Amiri" pitchFamily="2" charset="-78"/>
+                <a:ea typeface="Amiri" pitchFamily="2" charset="-78"/>
                 <a:cs typeface="Amiri" pitchFamily="2" charset="-78"/>
               </a:rPr>
               <a:t>قَيِّمْ عَمَلَكَ</a:t>
@@ -12381,6 +12468,7 @@
                   <a:srgbClr val="FFFFFF"/>
                 </a:solidFill>
                 <a:latin typeface="Amiri" pitchFamily="2" charset="-78"/>
+                <a:ea typeface="Amiri" pitchFamily="2" charset="-78"/>
                 <a:cs typeface="Amiri" pitchFamily="2" charset="-78"/>
               </a:rPr>
               <a:t>أَحْسَنْتُمْ! إِلَى اللِّقَاءِ</a:t>
@@ -12533,6 +12621,7 @@
                   <a:srgbClr val="D4AF37"/>
                 </a:solidFill>
                 <a:latin typeface="Amiri" pitchFamily="2" charset="-78"/>
+                <a:ea typeface="Amiri" pitchFamily="2" charset="-78"/>
                 <a:cs typeface="Amiri" pitchFamily="2" charset="-78"/>
               </a:rPr>
               <a:t>وَرْشَةُ التَّدْرِيبِ</a:t>
@@ -12666,6 +12755,7 @@
                   <a:srgbClr val="D4AF37"/>
                 </a:solidFill>
                 <a:latin typeface="Amiri" pitchFamily="2" charset="-78"/>
+                <a:ea typeface="Amiri" pitchFamily="2" charset="-78"/>
                 <a:cs typeface="Amiri" pitchFamily="2" charset="-78"/>
               </a:rPr>
               <a:t>م</a:t>
@@ -12986,6 +13076,7 @@
                   <a:srgbClr val="8A6D1E"/>
                 </a:solidFill>
                 <a:latin typeface="Amiri" pitchFamily="2" charset="-78"/>
+                <a:ea typeface="Amiri" pitchFamily="2" charset="-78"/>
                 <a:cs typeface="Amiri" pitchFamily="2" charset="-78"/>
               </a:rPr>
               <a:t>آدَابُ الصَّفِّ</a:t>
@@ -14517,6 +14608,7 @@
                   <a:srgbClr val="D4AF37"/>
                 </a:solidFill>
                 <a:latin typeface="Amiri" pitchFamily="2" charset="-78"/>
+                <a:ea typeface="Amiri" pitchFamily="2" charset="-78"/>
                 <a:cs typeface="Amiri" pitchFamily="2" charset="-78"/>
               </a:rPr>
               <a:t>م</a:t>
@@ -14837,6 +14929,7 @@
                   <a:srgbClr val="8A6D1E"/>
                 </a:solidFill>
                 <a:latin typeface="Amiri" pitchFamily="2" charset="-78"/>
+                <a:ea typeface="Amiri" pitchFamily="2" charset="-78"/>
                 <a:cs typeface="Amiri" pitchFamily="2" charset="-78"/>
               </a:rPr>
               <a:t>خَرِيطَةُ الوَرْشَةِ</a:t>
@@ -15151,6 +15244,7 @@
                   <a:srgbClr val="1B3B6F"/>
                 </a:solidFill>
                 <a:latin typeface="Amiri" pitchFamily="2" charset="-78"/>
+                <a:ea typeface="Amiri" pitchFamily="2" charset="-78"/>
                 <a:cs typeface="Amiri" pitchFamily="2" charset="-78"/>
               </a:rPr>
               <a:t>كَيْفَ</a:t>
@@ -15427,6 +15521,7 @@
                   <a:srgbClr val="1E6B52"/>
                 </a:solidFill>
                 <a:latin typeface="Amiri" pitchFamily="2" charset="-78"/>
+                <a:ea typeface="Amiri" pitchFamily="2" charset="-78"/>
                 <a:cs typeface="Amiri" pitchFamily="2" charset="-78"/>
               </a:rPr>
               <a:t>الاسْتِمَارَةُ</a:t>
@@ -15703,6 +15798,7 @@
                   <a:srgbClr val="1E6B52"/>
                 </a:solidFill>
                 <a:latin typeface="Amiri" pitchFamily="2" charset="-78"/>
+                <a:ea typeface="Amiri" pitchFamily="2" charset="-78"/>
                 <a:cs typeface="Amiri" pitchFamily="2" charset="-78"/>
               </a:rPr>
               <a:t>الرِّسَالَةُ</a:t>
@@ -15979,6 +16075,7 @@
                   <a:srgbClr val="1E6B52"/>
                 </a:solidFill>
                 <a:latin typeface="Amiri" pitchFamily="2" charset="-78"/>
+                <a:ea typeface="Amiri" pitchFamily="2" charset="-78"/>
                 <a:cs typeface="Amiri" pitchFamily="2" charset="-78"/>
               </a:rPr>
               <a:t>المَقَالُ</a:t>
@@ -16255,6 +16352,7 @@
                   <a:srgbClr val="8A6D1E"/>
                 </a:solidFill>
                 <a:latin typeface="Amiri" pitchFamily="2" charset="-78"/>
+                <a:ea typeface="Amiri" pitchFamily="2" charset="-78"/>
                 <a:cs typeface="Amiri" pitchFamily="2" charset="-78"/>
               </a:rPr>
               <a:t>قَيِّمْ</a:t>
@@ -16498,6 +16596,7 @@
                   <a:srgbClr val="D4AF37"/>
                 </a:solidFill>
                 <a:latin typeface="Amiri" pitchFamily="2" charset="-78"/>
+                <a:ea typeface="Amiri" pitchFamily="2" charset="-78"/>
                 <a:cs typeface="Amiri" pitchFamily="2" charset="-78"/>
               </a:rPr>
               <a:t>م</a:t>
@@ -16818,6 +16917,7 @@
                   <a:srgbClr val="8A6D1E"/>
                 </a:solidFill>
                 <a:latin typeface="Amiri" pitchFamily="2" charset="-78"/>
+                <a:ea typeface="Amiri" pitchFamily="2" charset="-78"/>
                 <a:cs typeface="Amiri" pitchFamily="2" charset="-78"/>
               </a:rPr>
               <a:t>امْتِحَانُ الكِتَابَةِ</a:t>
@@ -17442,6 +17542,7 @@
                   <a:srgbClr val="1B3B6F"/>
                 </a:solidFill>
                 <a:latin typeface="Amiri" pitchFamily="2" charset="-78"/>
+                <a:ea typeface="Amiri" pitchFamily="2" charset="-78"/>
                 <a:cs typeface="Amiri" pitchFamily="2" charset="-78"/>
               </a:rPr>
               <a:t>هُوِيَّتِي مَزِيجٌ مِنْ ثَقَافَتَيْنِ</a:t>
@@ -17541,6 +17642,7 @@
                   <a:srgbClr val="1B3B6F"/>
                 </a:solidFill>
                 <a:latin typeface="Amiri" pitchFamily="2" charset="-78"/>
+                <a:ea typeface="Amiri" pitchFamily="2" charset="-78"/>
                 <a:cs typeface="Amiri" pitchFamily="2" charset="-78"/>
               </a:rPr>
               <a:t>إِنَّ أُسْرَتِي مُهِمَّةٌ جِدًّا فِي ثَقَافَتِنَا؛ مَثَلًا …</a:t>
@@ -17640,6 +17742,7 @@
                   <a:srgbClr val="1B3B6F"/>
                 </a:solidFill>
                 <a:latin typeface="Amiri" pitchFamily="2" charset="-78"/>
+                <a:ea typeface="Amiri" pitchFamily="2" charset="-78"/>
                 <a:cs typeface="Amiri" pitchFamily="2" charset="-78"/>
               </a:rPr>
               <a:t>أَنَا فَخُورٌ بِثَقَافَتِي، لِأَنَّهَا تُعَلِّمُنِي …</a:t>
@@ -17811,6 +17914,7 @@
                   <a:srgbClr val="D4AF37"/>
                 </a:solidFill>
                 <a:latin typeface="Amiri" pitchFamily="2" charset="-78"/>
+                <a:ea typeface="Amiri" pitchFamily="2" charset="-78"/>
                 <a:cs typeface="Amiri" pitchFamily="2" charset="-78"/>
               </a:rPr>
               <a:t>م</a:t>
@@ -18131,6 +18235,7 @@
                   <a:srgbClr val="8A6D1E"/>
                 </a:solidFill>
                 <a:latin typeface="Amiri" pitchFamily="2" charset="-78"/>
+                <a:ea typeface="Amiri" pitchFamily="2" charset="-78"/>
                 <a:cs typeface="Amiri" pitchFamily="2" charset="-78"/>
               </a:rPr>
               <a:t>اسْتِمَارَةُ المَلَفِّ الثَّقَافِيِّ</a:t>
@@ -18487,6 +18592,7 @@
                   <a:srgbClr val="1B3B6F"/>
                 </a:solidFill>
                 <a:latin typeface="Amiri" pitchFamily="2" charset="-78"/>
+                <a:ea typeface="Amiri" pitchFamily="2" charset="-78"/>
                 <a:cs typeface="Amiri" pitchFamily="2" charset="-78"/>
               </a:rPr>
               <a:t>الاسْمُ</a:t>
@@ -18731,6 +18837,7 @@
                   <a:srgbClr val="1B3B6F"/>
                 </a:solidFill>
                 <a:latin typeface="Amiri" pitchFamily="2" charset="-78"/>
+                <a:ea typeface="Amiri" pitchFamily="2" charset="-78"/>
                 <a:cs typeface="Amiri" pitchFamily="2" charset="-78"/>
               </a:rPr>
               <a:t>أَصْلُ الأُسْرَةِ</a:t>
@@ -18975,6 +19082,7 @@
                   <a:srgbClr val="1B3B6F"/>
                 </a:solidFill>
                 <a:latin typeface="Amiri" pitchFamily="2" charset="-78"/>
+                <a:ea typeface="Amiri" pitchFamily="2" charset="-78"/>
                 <a:cs typeface="Amiri" pitchFamily="2" charset="-78"/>
               </a:rPr>
               <a:t>لُغَةُ البَيْتِ</a:t>
@@ -19219,6 +19327,7 @@
                   <a:srgbClr val="1B3B6F"/>
                 </a:solidFill>
                 <a:latin typeface="Amiri" pitchFamily="2" charset="-78"/>
+                <a:ea typeface="Amiri" pitchFamily="2" charset="-78"/>
                 <a:cs typeface="Amiri" pitchFamily="2" charset="-78"/>
               </a:rPr>
               <a:t>أَكْلَةٌ شَعْبِيَّةٌ</a:t>
@@ -19463,6 +19572,7 @@
                   <a:srgbClr val="1B3B6F"/>
                 </a:solidFill>
                 <a:latin typeface="Amiri" pitchFamily="2" charset="-78"/>
+                <a:ea typeface="Amiri" pitchFamily="2" charset="-78"/>
                 <a:cs typeface="Amiri" pitchFamily="2" charset="-78"/>
               </a:rPr>
               <a:t>زِيٌّ تَقْلِيدِيٌّ</a:t>
@@ -19707,6 +19817,7 @@
                   <a:srgbClr val="1B3B6F"/>
                 </a:solidFill>
                 <a:latin typeface="Amiri" pitchFamily="2" charset="-78"/>
+                <a:ea typeface="Amiri" pitchFamily="2" charset="-78"/>
                 <a:cs typeface="Amiri" pitchFamily="2" charset="-78"/>
               </a:rPr>
               <a:t>مُنَاسَبَةٌ مُهِمَّةٌ</a:t>
@@ -19951,6 +20062,7 @@
                   <a:srgbClr val="1B3B6F"/>
                 </a:solidFill>
                 <a:latin typeface="Amiri" pitchFamily="2" charset="-78"/>
+                <a:ea typeface="Amiri" pitchFamily="2" charset="-78"/>
                 <a:cs typeface="Amiri" pitchFamily="2" charset="-78"/>
               </a:rPr>
               <a:t>قِيمَةٌ مُهِمَّةٌ فِي ثَقَافَتِكَ</a:t>
@@ -20130,6 +20242,7 @@
                   <a:srgbClr val="1B3B6F"/>
                 </a:solidFill>
                 <a:latin typeface="Amiri" pitchFamily="2" charset="-78"/>
+                <a:ea typeface="Amiri" pitchFamily="2" charset="-78"/>
                 <a:cs typeface="Amiri" pitchFamily="2" charset="-78"/>
               </a:rPr>
               <a:t>جُمْلَةٌ: لِمَاذَا تَعْتَزُّ بِثَقَافَتِكَ؟</a:t>
@@ -20339,6 +20452,7 @@
                   <a:srgbClr val="D4AF37"/>
                 </a:solidFill>
                 <a:latin typeface="Amiri" pitchFamily="2" charset="-78"/>
+                <a:ea typeface="Amiri" pitchFamily="2" charset="-78"/>
                 <a:cs typeface="Amiri" pitchFamily="2" charset="-78"/>
               </a:rPr>
               <a:t>م</a:t>
@@ -20659,6 +20773,7 @@
                   <a:srgbClr val="8A6D1E"/>
                 </a:solidFill>
                 <a:latin typeface="Amiri" pitchFamily="2" charset="-78"/>
+                <a:ea typeface="Amiri" pitchFamily="2" charset="-78"/>
                 <a:cs typeface="Amiri" pitchFamily="2" charset="-78"/>
               </a:rPr>
               <a:t>نَمُوذَجُ الإِجَابَةِ</a:t>
@@ -20977,6 +21092,7 @@
                   <a:srgbClr val="1B3B6F"/>
                 </a:solidFill>
                 <a:latin typeface="Amiri" pitchFamily="2" charset="-78"/>
+                <a:ea typeface="Amiri" pitchFamily="2" charset="-78"/>
                 <a:cs typeface="Amiri" pitchFamily="2" charset="-78"/>
               </a:rPr>
               <a:t>إِبْرَاهِيمُ خَلِيلٌ</a:t>
@@ -21015,6 +21131,7 @@
                   <a:srgbClr val="1B3B6F"/>
                 </a:solidFill>
                 <a:latin typeface="Amiri" pitchFamily="2" charset="-78"/>
+                <a:ea typeface="Amiri" pitchFamily="2" charset="-78"/>
                 <a:cs typeface="Amiri" pitchFamily="2" charset="-78"/>
               </a:rPr>
               <a:t>الاسْمُ</a:t>
@@ -21156,6 +21273,7 @@
                   <a:srgbClr val="1B3B6F"/>
                 </a:solidFill>
                 <a:latin typeface="Amiri" pitchFamily="2" charset="-78"/>
+                <a:ea typeface="Amiri" pitchFamily="2" charset="-78"/>
                 <a:cs typeface="Amiri" pitchFamily="2" charset="-78"/>
               </a:rPr>
               <a:t>فِلَسْطِينُ</a:t>
@@ -21194,6 +21312,7 @@
                   <a:srgbClr val="1B3B6F"/>
                 </a:solidFill>
                 <a:latin typeface="Amiri" pitchFamily="2" charset="-78"/>
+                <a:ea typeface="Amiri" pitchFamily="2" charset="-78"/>
                 <a:cs typeface="Amiri" pitchFamily="2" charset="-78"/>
               </a:rPr>
               <a:t>أَصْلُ الأُسْرَةِ</a:t>
@@ -21335,6 +21454,7 @@
                   <a:srgbClr val="1B3B6F"/>
                 </a:solidFill>
                 <a:latin typeface="Amiri" pitchFamily="2" charset="-78"/>
+                <a:ea typeface="Amiri" pitchFamily="2" charset="-78"/>
                 <a:cs typeface="Amiri" pitchFamily="2" charset="-78"/>
               </a:rPr>
               <a:t>العَرَبِيَّةُ</a:t>
@@ -21373,6 +21493,7 @@
                   <a:srgbClr val="1B3B6F"/>
                 </a:solidFill>
                 <a:latin typeface="Amiri" pitchFamily="2" charset="-78"/>
+                <a:ea typeface="Amiri" pitchFamily="2" charset="-78"/>
                 <a:cs typeface="Amiri" pitchFamily="2" charset="-78"/>
               </a:rPr>
               <a:t>لُغَةُ البَيْتِ</a:t>
@@ -21514,6 +21635,7 @@
                   <a:srgbClr val="1B3B6F"/>
                 </a:solidFill>
                 <a:latin typeface="Amiri" pitchFamily="2" charset="-78"/>
+                <a:ea typeface="Amiri" pitchFamily="2" charset="-78"/>
                 <a:cs typeface="Amiri" pitchFamily="2" charset="-78"/>
               </a:rPr>
               <a:t>المَقْلُوبَةُ</a:t>
@@ -21552,6 +21674,7 @@
                   <a:srgbClr val="1B3B6F"/>
                 </a:solidFill>
                 <a:latin typeface="Amiri" pitchFamily="2" charset="-78"/>
+                <a:ea typeface="Amiri" pitchFamily="2" charset="-78"/>
                 <a:cs typeface="Amiri" pitchFamily="2" charset="-78"/>
               </a:rPr>
               <a:t>أَكْلَةٌ شَعْبِيَّةٌ</a:t>
@@ -21693,6 +21816,7 @@
                   <a:srgbClr val="1B3B6F"/>
                 </a:solidFill>
                 <a:latin typeface="Amiri" pitchFamily="2" charset="-78"/>
+                <a:ea typeface="Amiri" pitchFamily="2" charset="-78"/>
                 <a:cs typeface="Amiri" pitchFamily="2" charset="-78"/>
               </a:rPr>
               <a:t>الكُوفِيَّةُ</a:t>
@@ -21731,6 +21855,7 @@
                   <a:srgbClr val="1B3B6F"/>
                 </a:solidFill>
                 <a:latin typeface="Amiri" pitchFamily="2" charset="-78"/>
+                <a:ea typeface="Amiri" pitchFamily="2" charset="-78"/>
                 <a:cs typeface="Amiri" pitchFamily="2" charset="-78"/>
               </a:rPr>
               <a:t>زِيٌّ تَقْلِيدِيٌّ</a:t>
@@ -21872,6 +21997,7 @@
                   <a:srgbClr val="1B3B6F"/>
                 </a:solidFill>
                 <a:latin typeface="Amiri" pitchFamily="2" charset="-78"/>
+                <a:ea typeface="Amiri" pitchFamily="2" charset="-78"/>
                 <a:cs typeface="Amiri" pitchFamily="2" charset="-78"/>
               </a:rPr>
               <a:t>عِيدُ الفِطْرِ</a:t>
@@ -21910,6 +22036,7 @@
                   <a:srgbClr val="1B3B6F"/>
                 </a:solidFill>
                 <a:latin typeface="Amiri" pitchFamily="2" charset="-78"/>
+                <a:ea typeface="Amiri" pitchFamily="2" charset="-78"/>
                 <a:cs typeface="Amiri" pitchFamily="2" charset="-78"/>
               </a:rPr>
               <a:t>مُنَاسَبَةٌ مُهِمَّةٌ</a:t>
@@ -22051,6 +22178,7 @@
                   <a:srgbClr val="1B3B6F"/>
                 </a:solidFill>
                 <a:latin typeface="Amiri" pitchFamily="2" charset="-78"/>
+                <a:ea typeface="Amiri" pitchFamily="2" charset="-78"/>
                 <a:cs typeface="Amiri" pitchFamily="2" charset="-78"/>
               </a:rPr>
               <a:t>الكَرَمُ</a:t>
@@ -22089,6 +22217,7 @@
                   <a:srgbClr val="1B3B6F"/>
                 </a:solidFill>
                 <a:latin typeface="Amiri" pitchFamily="2" charset="-78"/>
+                <a:ea typeface="Amiri" pitchFamily="2" charset="-78"/>
                 <a:cs typeface="Amiri" pitchFamily="2" charset="-78"/>
               </a:rPr>
               <a:t>قِيمَةٌ مُهِمَّةٌ فِي ثَقَافَتِكَ</a:t>
@@ -22230,6 +22359,7 @@
                   <a:srgbClr val="1B3B6F"/>
                 </a:solidFill>
                 <a:latin typeface="Amiri" pitchFamily="2" charset="-78"/>
+                <a:ea typeface="Amiri" pitchFamily="2" charset="-78"/>
                 <a:cs typeface="Amiri" pitchFamily="2" charset="-78"/>
               </a:rPr>
               <a:t>أَعْتَزُّ بِثَقَافَتِي لِأَنَّهَا تَجْمَعُ أُسْرَتِي؛ مَثَلًا، نَلْتَقِي كُلَّ جُمُعَةٍ.</a:t>
@@ -22268,6 +22398,7 @@
                   <a:srgbClr val="1B3B6F"/>
                 </a:solidFill>
                 <a:latin typeface="Amiri" pitchFamily="2" charset="-78"/>
+                <a:ea typeface="Amiri" pitchFamily="2" charset="-78"/>
                 <a:cs typeface="Amiri" pitchFamily="2" charset="-78"/>
               </a:rPr>
               <a:t>جُمْلَةٌ: لِمَاذَا تَعْتَزُّ بِثَقَافَتِكَ؟</a:t>
@@ -22477,6 +22608,7 @@
                   <a:srgbClr val="D4AF37"/>
                 </a:solidFill>
                 <a:latin typeface="Amiri" pitchFamily="2" charset="-78"/>
+                <a:ea typeface="Amiri" pitchFamily="2" charset="-78"/>
                 <a:cs typeface="Amiri" pitchFamily="2" charset="-78"/>
               </a:rPr>
               <a:t>م</a:t>
@@ -22797,6 +22929,7 @@
                   <a:srgbClr val="8A6D1E"/>
                 </a:solidFill>
                 <a:latin typeface="Amiri" pitchFamily="2" charset="-78"/>
+                <a:ea typeface="Amiri" pitchFamily="2" charset="-78"/>
                 <a:cs typeface="Amiri" pitchFamily="2" charset="-78"/>
               </a:rPr>
               <a:t>صُنْدُوقُ هُوِيَّتِي</a:t>
@@ -23099,6 +23232,7 @@
                   <a:srgbClr val="1F2A37"/>
                 </a:solidFill>
                 <a:latin typeface="Amiri" pitchFamily="2" charset="-78"/>
+                <a:ea typeface="Amiri" pitchFamily="2" charset="-78"/>
                 <a:cs typeface="Amiri" pitchFamily="2" charset="-78"/>
               </a:rPr>
               <a:t>ثَقَافَتِي</a:t>
@@ -23125,6 +23259,7 @@
                   <a:srgbClr val="1F2A37"/>
                 </a:solidFill>
                 <a:latin typeface="Amiri" pitchFamily="2" charset="-78"/>
+                <a:ea typeface="Amiri" pitchFamily="2" charset="-78"/>
                 <a:cs typeface="Amiri" pitchFamily="2" charset="-78"/>
               </a:rPr>
               <a:t>أَكْلَتُنَا</a:t>
@@ -23324,6 +23459,7 @@
                   <a:srgbClr val="1B3B6F"/>
                 </a:solidFill>
                 <a:latin typeface="Amiri" pitchFamily="2" charset="-78"/>
+                <a:ea typeface="Amiri" pitchFamily="2" charset="-78"/>
                 <a:cs typeface="Amiri" pitchFamily="2" charset="-78"/>
               </a:rPr>
               <a:t>طَلَبَتْ مِنَّا المُعَلِّمَةُ مَشْرُوعًا اسْمُهُ …</a:t>
@@ -23400,6 +23536,7 @@
                   <a:srgbClr val="1B3B6F"/>
                 </a:solidFill>
                 <a:latin typeface="Amiri" pitchFamily="2" charset="-78"/>
+                <a:ea typeface="Amiri" pitchFamily="2" charset="-78"/>
                 <a:cs typeface="Amiri" pitchFamily="2" charset="-78"/>
               </a:rPr>
               <a:t>فِي صُنْدُوقِي وَضَعْتُ …</a:t>
@@ -23476,6 +23613,7 @@
                   <a:srgbClr val="1B3B6F"/>
                 </a:solidFill>
                 <a:latin typeface="Amiri" pitchFamily="2" charset="-78"/>
+                <a:ea typeface="Amiri" pitchFamily="2" charset="-78"/>
                 <a:cs typeface="Amiri" pitchFamily="2" charset="-78"/>
               </a:rPr>
               <a:t>اخْتَرْتُهَا لِأَنَّهَا جُزْءٌ مِنْ ثَقَافَتِي</a:t>
@@ -23552,6 +23690,7 @@
                   <a:srgbClr val="1B3B6F"/>
                 </a:solidFill>
                 <a:latin typeface="Amiri" pitchFamily="2" charset="-78"/>
+                <a:ea typeface="Amiri" pitchFamily="2" charset="-78"/>
                 <a:cs typeface="Amiri" pitchFamily="2" charset="-78"/>
               </a:rPr>
               <a:t>إِنَّ المَشْرُوعَ كَانَ …</a:t>
@@ -23723,6 +23862,7 @@
                   <a:srgbClr val="D4AF37"/>
                 </a:solidFill>
                 <a:latin typeface="Amiri" pitchFamily="2" charset="-78"/>
+                <a:ea typeface="Amiri" pitchFamily="2" charset="-78"/>
                 <a:cs typeface="Amiri" pitchFamily="2" charset="-78"/>
               </a:rPr>
               <a:t>م</a:t>
@@ -24043,6 +24183,7 @@
                   <a:srgbClr val="8A6D1E"/>
                 </a:solidFill>
                 <a:latin typeface="Amiri" pitchFamily="2" charset="-78"/>
+                <a:ea typeface="Amiri" pitchFamily="2" charset="-78"/>
                 <a:cs typeface="Amiri" pitchFamily="2" charset="-78"/>
               </a:rPr>
               <a:t>نَصُّ السُّؤَالِ</a:t>
@@ -24323,6 +24464,7 @@
                   <a:srgbClr val="1B3B6F"/>
                 </a:solidFill>
                 <a:latin typeface="Amiri" pitchFamily="2" charset="-78"/>
+                <a:ea typeface="Amiri" pitchFamily="2" charset="-78"/>
                 <a:cs typeface="Amiri" pitchFamily="2" charset="-78"/>
               </a:rPr>
               <a:t>اكْتُبْ رِسَالَةً إِلَى صَدِيقِكَ عَنْ مَشْرُوعِ "صُنْدُوقِ الهُوِيَّةِ" (٨٠–٩٠ كَلِمَةً).</a:t>
@@ -24464,6 +24606,7 @@
                   <a:srgbClr val="1B3B6F"/>
                 </a:solidFill>
                 <a:latin typeface="Amiri" pitchFamily="2" charset="-78"/>
+                <a:ea typeface="Amiri" pitchFamily="2" charset="-78"/>
                 <a:cs typeface="Amiri" pitchFamily="2" charset="-78"/>
               </a:rPr>
               <a:t>مَا المَشْرُوعُ؟</a:t>
@@ -24605,6 +24748,7 @@
                   <a:srgbClr val="1B3B6F"/>
                 </a:solidFill>
                 <a:latin typeface="Amiri" pitchFamily="2" charset="-78"/>
+                <a:ea typeface="Amiri" pitchFamily="2" charset="-78"/>
                 <a:cs typeface="Amiri" pitchFamily="2" charset="-78"/>
               </a:rPr>
               <a:t>مَاذَا وَضَعْتَ فِي صُنْدُوقِكَ؟</a:t>
@@ -24746,6 +24890,7 @@
                   <a:srgbClr val="1B3B6F"/>
                 </a:solidFill>
                 <a:latin typeface="Amiri" pitchFamily="2" charset="-78"/>
+                <a:ea typeface="Amiri" pitchFamily="2" charset="-78"/>
                 <a:cs typeface="Amiri" pitchFamily="2" charset="-78"/>
               </a:rPr>
               <a:t>لِمَاذَا اخْتَرْتَ هٰذِهِ الأَشْيَاءَ؟</a:t>
@@ -24887,6 +25032,7 @@
                   <a:srgbClr val="1B3B6F"/>
                 </a:solidFill>
                 <a:latin typeface="Amiri" pitchFamily="2" charset="-78"/>
+                <a:ea typeface="Amiri" pitchFamily="2" charset="-78"/>
                 <a:cs typeface="Amiri" pitchFamily="2" charset="-78"/>
               </a:rPr>
               <a:t>مَا رَأْيُكَ فِي المَشْرُوعِ؟ وَمَاذَا سَتَفْعَلُ؟ وَاسْأَلْ صَدِيقَكَ سُؤَالًا.</a:t>
@@ -25096,6 +25242,7 @@
                   <a:srgbClr val="D4AF37"/>
                 </a:solidFill>
                 <a:latin typeface="Amiri" pitchFamily="2" charset="-78"/>
+                <a:ea typeface="Amiri" pitchFamily="2" charset="-78"/>
                 <a:cs typeface="Amiri" pitchFamily="2" charset="-78"/>
               </a:rPr>
               <a:t>م</a:t>
@@ -25416,6 +25563,7 @@
                   <a:srgbClr val="8A6D1E"/>
                 </a:solidFill>
                 <a:latin typeface="Amiri" pitchFamily="2" charset="-78"/>
+                <a:ea typeface="Amiri" pitchFamily="2" charset="-78"/>
                 <a:cs typeface="Amiri" pitchFamily="2" charset="-78"/>
               </a:rPr>
               <a:t>قَوَالِبُ الكِتَابَةِ</a:t>
@@ -25696,6 +25844,7 @@
                   <a:srgbClr val="1B3B6F"/>
                 </a:solidFill>
                 <a:latin typeface="Amiri" pitchFamily="2" charset="-78"/>
+                <a:ea typeface="Amiri" pitchFamily="2" charset="-78"/>
                 <a:cs typeface="Amiri" pitchFamily="2" charset="-78"/>
               </a:rPr>
               <a:t>مَرْحَبًا يَا ______ ، كَيْفَ حَالُكَ؟</a:t>
@@ -25902,6 +26051,7 @@
                   <a:srgbClr val="1B3B6F"/>
                 </a:solidFill>
                 <a:latin typeface="Amiri" pitchFamily="2" charset="-78"/>
+                <a:ea typeface="Amiri" pitchFamily="2" charset="-78"/>
                 <a:cs typeface="Amiri" pitchFamily="2" charset="-78"/>
               </a:rPr>
               <a:t>طَلَبَتْ مِنَّا المُعَلِّمَةُ مَشْرُوعًا اسْمُهُ ______ .</a:t>
@@ -26108,6 +26258,7 @@
                   <a:srgbClr val="1B3B6F"/>
                 </a:solidFill>
                 <a:latin typeface="Amiri" pitchFamily="2" charset="-78"/>
+                <a:ea typeface="Amiri" pitchFamily="2" charset="-78"/>
                 <a:cs typeface="Amiri" pitchFamily="2" charset="-78"/>
               </a:rPr>
               <a:t>فِي صُنْدُوقِي وَضَعْتُ ______ وَ______ .</a:t>
@@ -26314,6 +26465,7 @@
                   <a:srgbClr val="1B3B6F"/>
                 </a:solidFill>
                 <a:latin typeface="Amiri" pitchFamily="2" charset="-78"/>
+                <a:ea typeface="Amiri" pitchFamily="2" charset="-78"/>
                 <a:cs typeface="Amiri" pitchFamily="2" charset="-78"/>
               </a:rPr>
               <a:t>اخْتَرْتُهَا لِأَنَّ ______ ؛ مَثَلًا، ______ .</a:t>
@@ -26520,6 +26672,7 @@
                   <a:srgbClr val="1B3B6F"/>
                 </a:solidFill>
                 <a:latin typeface="Amiri" pitchFamily="2" charset="-78"/>
+                <a:ea typeface="Amiri" pitchFamily="2" charset="-78"/>
                 <a:cs typeface="Amiri" pitchFamily="2" charset="-78"/>
               </a:rPr>
               <a:t>إِنَّ المَشْرُوعَ ______ . سَأُقَدِّمُهُ ______ .</a:t>
@@ -26726,6 +26879,7 @@
                   <a:srgbClr val="1B3B6F"/>
                 </a:solidFill>
                 <a:latin typeface="Amiri" pitchFamily="2" charset="-78"/>
+                <a:ea typeface="Amiri" pitchFamily="2" charset="-78"/>
                 <a:cs typeface="Amiri" pitchFamily="2" charset="-78"/>
               </a:rPr>
               <a:t>وَأَنْتَ، ______ ؟ مَعَ السَّلَامَةِ.</a:t>
@@ -26965,13 +27119,9 @@
     <a:fontScheme name="Office">
       <a:majorFont>
         <a:latin typeface="Calibri Light" panose="020F0302020204030204"/>
-        <a:ea typeface=""/>
-        <a:cs typeface=""/>
-        <a:font script="Jpan" typeface="游ゴシック Light"/>
-        <a:font script="Hang" typeface="맑은 고딕"/>
-        <a:font script="Hans" typeface="等线 Light"/>
-        <a:font script="Hant" typeface="新細明體"/>
-        <a:font script="Arab" typeface="Times New Roman"/>
+        <a:ea typeface="Amiri" pitchFamily="2" charset="-78"/>
+        <a:cs typeface="Amiri" pitchFamily="2" charset="-78"/>
+        <a:font script="Arab" typeface="Amiri"/>
         <a:font script="Hebr" typeface="Times New Roman"/>
         <a:font script="Thai" typeface="Angsana New"/>
         <a:font script="Ethi" typeface="Nyala"/>
@@ -27017,13 +27167,9 @@
       </a:majorFont>
       <a:minorFont>
         <a:latin typeface="Calibri" panose="020F0502020204030204"/>
-        <a:ea typeface=""/>
-        <a:cs typeface=""/>
-        <a:font script="Jpan" typeface="游ゴシック"/>
-        <a:font script="Hang" typeface="맑은 고딕"/>
-        <a:font script="Hans" typeface="等线"/>
-        <a:font script="Hant" typeface="新細明體"/>
-        <a:font script="Arab" typeface="Arial"/>
+        <a:ea typeface="Amiri" pitchFamily="2" charset="-78"/>
+        <a:cs typeface="Amiri" pitchFamily="2" charset="-78"/>
+        <a:font script="Arab" typeface="Amiri"/>
         <a:font script="Hebr" typeface="Arial"/>
         <a:font script="Thai" typeface="Cordia New"/>
         <a:font script="Ethi" typeface="Nyala"/>

--- a/Topic_E/Exam_Practice/TE-L03_Writing_Workshop_Culture_and_Personal_Identity.pptx
+++ b/Topic_E/Exam_Practice/TE-L03_Writing_Workshop_Culture_and_Personal_Identity.pptx
@@ -3848,7 +3848,7 @@
                 <a:solidFill>
                   <a:srgbClr val="FFFFFF"/>
                 </a:solidFill>
-                <a:latin typeface="Calibri" pitchFamily="34" charset="0"/>
+                <a:latin typeface="Amiri" pitchFamily="2" charset="-78"/>
                 <a:ea typeface="Amiri" pitchFamily="2" charset="-78"/>
                 <a:cs typeface="Amiri" pitchFamily="2" charset="-78"/>
               </a:rPr>
@@ -3914,7 +3914,7 @@
                 <a:solidFill>
                   <a:srgbClr val="FFFFFF"/>
                 </a:solidFill>
-                <a:latin typeface="Calibri" pitchFamily="34" charset="0"/>
+                <a:latin typeface="Amiri" pitchFamily="2" charset="-78"/>
                 <a:ea typeface="Amiri" pitchFamily="2" charset="-78"/>
                 <a:cs typeface="Amiri" pitchFamily="2" charset="-78"/>
               </a:rPr>
@@ -3980,7 +3980,7 @@
                 <a:solidFill>
                   <a:srgbClr val="FFFFFF"/>
                 </a:solidFill>
-                <a:latin typeface="Calibri" pitchFamily="34" charset="0"/>
+                <a:latin typeface="Amiri" pitchFamily="2" charset="-78"/>
                 <a:ea typeface="Amiri" pitchFamily="2" charset="-78"/>
                 <a:cs typeface="Amiri" pitchFamily="2" charset="-78"/>
               </a:rPr>
@@ -4046,7 +4046,7 @@
                 <a:solidFill>
                   <a:srgbClr val="FFFFFF"/>
                 </a:solidFill>
-                <a:latin typeface="Calibri" pitchFamily="34" charset="0"/>
+                <a:latin typeface="Amiri" pitchFamily="2" charset="-78"/>
                 <a:ea typeface="Amiri" pitchFamily="2" charset="-78"/>
                 <a:cs typeface="Amiri" pitchFamily="2" charset="-78"/>
               </a:rPr>
@@ -4844,7 +4844,7 @@
                 <a:solidFill>
                   <a:srgbClr val="FFFFFF"/>
                 </a:solidFill>
-                <a:latin typeface="Calibri" pitchFamily="34" charset="0"/>
+                <a:latin typeface="Amiri" pitchFamily="2" charset="-78"/>
                 <a:ea typeface="Amiri" pitchFamily="2" charset="-78"/>
                 <a:cs typeface="Amiri" pitchFamily="2" charset="-78"/>
               </a:rPr>
@@ -4910,7 +4910,7 @@
                 <a:solidFill>
                   <a:srgbClr val="FFFFFF"/>
                 </a:solidFill>
-                <a:latin typeface="Calibri" pitchFamily="34" charset="0"/>
+                <a:latin typeface="Amiri" pitchFamily="2" charset="-78"/>
                 <a:ea typeface="Amiri" pitchFamily="2" charset="-78"/>
                 <a:cs typeface="Amiri" pitchFamily="2" charset="-78"/>
               </a:rPr>
@@ -4976,7 +4976,7 @@
                 <a:solidFill>
                   <a:srgbClr val="FFFFFF"/>
                 </a:solidFill>
-                <a:latin typeface="Calibri" pitchFamily="34" charset="0"/>
+                <a:latin typeface="Amiri" pitchFamily="2" charset="-78"/>
                 <a:ea typeface="Amiri" pitchFamily="2" charset="-78"/>
                 <a:cs typeface="Amiri" pitchFamily="2" charset="-78"/>
               </a:rPr>
@@ -5042,7 +5042,7 @@
                 <a:solidFill>
                   <a:srgbClr val="FFFFFF"/>
                 </a:solidFill>
-                <a:latin typeface="Calibri" pitchFamily="34" charset="0"/>
+                <a:latin typeface="Amiri" pitchFamily="2" charset="-78"/>
                 <a:ea typeface="Amiri" pitchFamily="2" charset="-78"/>
                 <a:cs typeface="Amiri" pitchFamily="2" charset="-78"/>
               </a:rPr>
@@ -8599,7 +8599,7 @@
                 <a:solidFill>
                   <a:srgbClr val="FFFFFF"/>
                 </a:solidFill>
-                <a:latin typeface="Calibri" pitchFamily="34" charset="0"/>
+                <a:latin typeface="Amiri" pitchFamily="2" charset="-78"/>
                 <a:ea typeface="Amiri" pitchFamily="2" charset="-78"/>
                 <a:cs typeface="Amiri" pitchFamily="2" charset="-78"/>
               </a:rPr>
@@ -8665,7 +8665,7 @@
                 <a:solidFill>
                   <a:srgbClr val="FFFFFF"/>
                 </a:solidFill>
-                <a:latin typeface="Calibri" pitchFamily="34" charset="0"/>
+                <a:latin typeface="Amiri" pitchFamily="2" charset="-78"/>
                 <a:ea typeface="Amiri" pitchFamily="2" charset="-78"/>
                 <a:cs typeface="Amiri" pitchFamily="2" charset="-78"/>
               </a:rPr>
@@ -8731,7 +8731,7 @@
                 <a:solidFill>
                   <a:srgbClr val="FFFFFF"/>
                 </a:solidFill>
-                <a:latin typeface="Calibri" pitchFamily="34" charset="0"/>
+                <a:latin typeface="Amiri" pitchFamily="2" charset="-78"/>
                 <a:ea typeface="Amiri" pitchFamily="2" charset="-78"/>
                 <a:cs typeface="Amiri" pitchFamily="2" charset="-78"/>
               </a:rPr>
@@ -8797,7 +8797,7 @@
                 <a:solidFill>
                   <a:srgbClr val="FFFFFF"/>
                 </a:solidFill>
-                <a:latin typeface="Calibri" pitchFamily="34" charset="0"/>
+                <a:latin typeface="Amiri" pitchFamily="2" charset="-78"/>
                 <a:ea typeface="Amiri" pitchFamily="2" charset="-78"/>
                 <a:cs typeface="Amiri" pitchFamily="2" charset="-78"/>
               </a:rPr>
@@ -9584,7 +9584,7 @@
                 <a:solidFill>
                   <a:srgbClr val="FFFFFF"/>
                 </a:solidFill>
-                <a:latin typeface="Calibri" pitchFamily="34" charset="0"/>
+                <a:latin typeface="Amiri" pitchFamily="2" charset="-78"/>
                 <a:ea typeface="Amiri" pitchFamily="2" charset="-78"/>
                 <a:cs typeface="Amiri" pitchFamily="2" charset="-78"/>
               </a:rPr>
@@ -9650,7 +9650,7 @@
                 <a:solidFill>
                   <a:srgbClr val="FFFFFF"/>
                 </a:solidFill>
-                <a:latin typeface="Calibri" pitchFamily="34" charset="0"/>
+                <a:latin typeface="Amiri" pitchFamily="2" charset="-78"/>
                 <a:ea typeface="Amiri" pitchFamily="2" charset="-78"/>
                 <a:cs typeface="Amiri" pitchFamily="2" charset="-78"/>
               </a:rPr>
@@ -9716,7 +9716,7 @@
                 <a:solidFill>
                   <a:srgbClr val="FFFFFF"/>
                 </a:solidFill>
-                <a:latin typeface="Calibri" pitchFamily="34" charset="0"/>
+                <a:latin typeface="Amiri" pitchFamily="2" charset="-78"/>
                 <a:ea typeface="Amiri" pitchFamily="2" charset="-78"/>
                 <a:cs typeface="Amiri" pitchFamily="2" charset="-78"/>
               </a:rPr>
@@ -9782,7 +9782,7 @@
                 <a:solidFill>
                   <a:srgbClr val="FFFFFF"/>
                 </a:solidFill>
-                <a:latin typeface="Calibri" pitchFamily="34" charset="0"/>
+                <a:latin typeface="Amiri" pitchFamily="2" charset="-78"/>
                 <a:ea typeface="Amiri" pitchFamily="2" charset="-78"/>
                 <a:cs typeface="Amiri" pitchFamily="2" charset="-78"/>
               </a:rPr>
@@ -10569,7 +10569,7 @@
                 <a:solidFill>
                   <a:srgbClr val="FFFFFF"/>
                 </a:solidFill>
-                <a:latin typeface="Calibri" pitchFamily="34" charset="0"/>
+                <a:latin typeface="Amiri" pitchFamily="2" charset="-78"/>
                 <a:ea typeface="Amiri" pitchFamily="2" charset="-78"/>
                 <a:cs typeface="Amiri" pitchFamily="2" charset="-78"/>
               </a:rPr>
@@ -10635,7 +10635,7 @@
                 <a:solidFill>
                   <a:srgbClr val="FFFFFF"/>
                 </a:solidFill>
-                <a:latin typeface="Calibri" pitchFamily="34" charset="0"/>
+                <a:latin typeface="Amiri" pitchFamily="2" charset="-78"/>
                 <a:ea typeface="Amiri" pitchFamily="2" charset="-78"/>
                 <a:cs typeface="Amiri" pitchFamily="2" charset="-78"/>
               </a:rPr>
@@ -10701,7 +10701,7 @@
                 <a:solidFill>
                   <a:srgbClr val="FFFFFF"/>
                 </a:solidFill>
-                <a:latin typeface="Calibri" pitchFamily="34" charset="0"/>
+                <a:latin typeface="Amiri" pitchFamily="2" charset="-78"/>
                 <a:ea typeface="Amiri" pitchFamily="2" charset="-78"/>
                 <a:cs typeface="Amiri" pitchFamily="2" charset="-78"/>
               </a:rPr>
@@ -10767,7 +10767,7 @@
                 <a:solidFill>
                   <a:srgbClr val="FFFFFF"/>
                 </a:solidFill>
-                <a:latin typeface="Calibri" pitchFamily="34" charset="0"/>
+                <a:latin typeface="Amiri" pitchFamily="2" charset="-78"/>
                 <a:ea typeface="Amiri" pitchFamily="2" charset="-78"/>
                 <a:cs typeface="Amiri" pitchFamily="2" charset="-78"/>
               </a:rPr>
